--- a/competition/haijuying-cretas-pitch.pptx
+++ b/competition/haijuying-cretas-pitch.pptx
@@ -14,6 +14,7 @@
     <p:sldId id="262" r:id="rId13"/>
     <p:sldId id="263" r:id="rId14"/>
     <p:sldId id="264" r:id="rId15"/>
+    <p:sldId id="265" r:id="rId16"/>
   </p:sldIdLst>
   <p:sldSz cx="12188952" cy="6858000" type="screen4x3"/>
   <p:notesSz cx="6858000" cy="9144000"/>
@@ -3128,6 +3129,48 @@
 </p:sld>
 </file>
 
+<file path=ppt/slides/slide10.xml><?xml version="1.0" encoding="utf-8"?>
+<p:sld xmlns:a="http://schemas.openxmlformats.org/drawingml/2006/main" xmlns:p="http://schemas.openxmlformats.org/presentationml/2006/main" xmlns:r="http://schemas.openxmlformats.org/officeDocument/2006/relationships">
+  <p:cSld>
+    <p:spTree>
+      <p:nvGrpSpPr>
+        <p:cNvPr id="1" name=""/>
+        <p:cNvGrpSpPr/>
+        <p:nvPr/>
+      </p:nvGrpSpPr>
+      <p:grpSpPr/>
+      <p:pic>
+        <p:nvPicPr>
+          <p:cNvPr id="2" name="Picture 1" descr="send.png"/>
+          <p:cNvPicPr>
+            <a:picLocks noChangeAspect="1"/>
+          </p:cNvPicPr>
+          <p:nvPr/>
+        </p:nvPicPr>
+        <p:blipFill>
+          <a:blip r:embed="rId2"/>
+          <a:stretch>
+            <a:fillRect/>
+          </a:stretch>
+        </p:blipFill>
+        <p:spPr>
+          <a:xfrm>
+            <a:off x="0" y="0"/>
+            <a:ext cx="12188952" cy="6858000"/>
+          </a:xfrm>
+          <a:prstGeom prst="rect">
+            <a:avLst/>
+          </a:prstGeom>
+        </p:spPr>
+      </p:pic>
+    </p:spTree>
+  </p:cSld>
+  <p:clrMapOvr>
+    <a:masterClrMapping/>
+  </p:clrMapOvr>
+</p:sld>
+</file>
+
 <file path=ppt/slides/slide2.xml><?xml version="1.0" encoding="utf-8"?>
 <p:sld xmlns:a="http://schemas.openxmlformats.org/drawingml/2006/main" xmlns:p="http://schemas.openxmlformats.org/presentationml/2006/main" xmlns:r="http://schemas.openxmlformats.org/officeDocument/2006/relationships">
   <p:cSld>
@@ -3308,7 +3351,7 @@
       <p:grpSpPr/>
       <p:pic>
         <p:nvPicPr>
-          <p:cNvPr id="2" name="Picture 1" descr="s5.png"/>
+          <p:cNvPr id="2" name="Picture 1" descr="s4b.png"/>
           <p:cNvPicPr>
             <a:picLocks noChangeAspect="1"/>
           </p:cNvPicPr>
@@ -3350,7 +3393,7 @@
       <p:grpSpPr/>
       <p:pic>
         <p:nvPicPr>
-          <p:cNvPr id="2" name="Picture 1" descr="s6.png"/>
+          <p:cNvPr id="2" name="Picture 1" descr="s5.png"/>
           <p:cNvPicPr>
             <a:picLocks noChangeAspect="1"/>
           </p:cNvPicPr>
@@ -3392,7 +3435,7 @@
       <p:grpSpPr/>
       <p:pic>
         <p:nvPicPr>
-          <p:cNvPr id="2" name="Picture 1" descr="s7.png"/>
+          <p:cNvPr id="2" name="Picture 1" descr="s6.png"/>
           <p:cNvPicPr>
             <a:picLocks noChangeAspect="1"/>
           </p:cNvPicPr>
@@ -3434,7 +3477,7 @@
       <p:grpSpPr/>
       <p:pic>
         <p:nvPicPr>
-          <p:cNvPr id="2" name="Picture 1" descr="send.png"/>
+          <p:cNvPr id="2" name="Picture 1" descr="s7.png"/>
           <p:cNvPicPr>
             <a:picLocks noChangeAspect="1"/>
           </p:cNvPicPr>

--- a/competition/haijuying-cretas-pitch.pptx
+++ b/competition/haijuying-cretas-pitch.pptx
@@ -15,6 +15,7 @@
     <p:sldId id="263" r:id="rId14"/>
     <p:sldId id="264" r:id="rId15"/>
     <p:sldId id="265" r:id="rId16"/>
+    <p:sldId id="266" r:id="rId17"/>
   </p:sldIdLst>
   <p:sldSz cx="12188952" cy="6858000" type="screen4x3"/>
   <p:notesSz cx="6858000" cy="9144000"/>
@@ -3141,6 +3142,48 @@
       <p:grpSpPr/>
       <p:pic>
         <p:nvPicPr>
+          <p:cNvPr id="2" name="Picture 1" descr="s7.png"/>
+          <p:cNvPicPr>
+            <a:picLocks noChangeAspect="1"/>
+          </p:cNvPicPr>
+          <p:nvPr/>
+        </p:nvPicPr>
+        <p:blipFill>
+          <a:blip r:embed="rId2"/>
+          <a:stretch>
+            <a:fillRect/>
+          </a:stretch>
+        </p:blipFill>
+        <p:spPr>
+          <a:xfrm>
+            <a:off x="0" y="0"/>
+            <a:ext cx="12188952" cy="6858000"/>
+          </a:xfrm>
+          <a:prstGeom prst="rect">
+            <a:avLst/>
+          </a:prstGeom>
+        </p:spPr>
+      </p:pic>
+    </p:spTree>
+  </p:cSld>
+  <p:clrMapOvr>
+    <a:masterClrMapping/>
+  </p:clrMapOvr>
+</p:sld>
+</file>
+
+<file path=ppt/slides/slide11.xml><?xml version="1.0" encoding="utf-8"?>
+<p:sld xmlns:a="http://schemas.openxmlformats.org/drawingml/2006/main" xmlns:p="http://schemas.openxmlformats.org/presentationml/2006/main" xmlns:r="http://schemas.openxmlformats.org/officeDocument/2006/relationships">
+  <p:cSld>
+    <p:spTree>
+      <p:nvGrpSpPr>
+        <p:cNvPr id="1" name=""/>
+        <p:cNvGrpSpPr/>
+        <p:nvPr/>
+      </p:nvGrpSpPr>
+      <p:grpSpPr/>
+      <p:pic>
+        <p:nvPicPr>
           <p:cNvPr id="2" name="Picture 1" descr="send.png"/>
           <p:cNvPicPr>
             <a:picLocks noChangeAspect="1"/>
@@ -3393,7 +3436,7 @@
       <p:grpSpPr/>
       <p:pic>
         <p:nvPicPr>
-          <p:cNvPr id="2" name="Picture 1" descr="s5.png"/>
+          <p:cNvPr id="2" name="Picture 1" descr="s4c.png"/>
           <p:cNvPicPr>
             <a:picLocks noChangeAspect="1"/>
           </p:cNvPicPr>
@@ -3435,7 +3478,7 @@
       <p:grpSpPr/>
       <p:pic>
         <p:nvPicPr>
-          <p:cNvPr id="2" name="Picture 1" descr="s6.png"/>
+          <p:cNvPr id="2" name="Picture 1" descr="s5.png"/>
           <p:cNvPicPr>
             <a:picLocks noChangeAspect="1"/>
           </p:cNvPicPr>
@@ -3477,7 +3520,7 @@
       <p:grpSpPr/>
       <p:pic>
         <p:nvPicPr>
-          <p:cNvPr id="2" name="Picture 1" descr="s7.png"/>
+          <p:cNvPr id="2" name="Picture 1" descr="s6.png"/>
           <p:cNvPicPr>
             <a:picLocks noChangeAspect="1"/>
           </p:cNvPicPr>

--- a/competition/haijuying-cretas-pitch.pptx
+++ b/competition/haijuying-cretas-pitch.pptx
@@ -16,6 +16,7 @@
     <p:sldId id="264" r:id="rId15"/>
     <p:sldId id="265" r:id="rId16"/>
     <p:sldId id="266" r:id="rId17"/>
+    <p:sldId id="267" r:id="rId18"/>
   </p:sldIdLst>
   <p:sldSz cx="12188952" cy="6858000" type="screen4x3"/>
   <p:notesSz cx="6858000" cy="9144000"/>
@@ -3142,6 +3143,48 @@
       <p:grpSpPr/>
       <p:pic>
         <p:nvPicPr>
+          <p:cNvPr id="2" name="Picture 1" descr="s6.png"/>
+          <p:cNvPicPr>
+            <a:picLocks noChangeAspect="1"/>
+          </p:cNvPicPr>
+          <p:nvPr/>
+        </p:nvPicPr>
+        <p:blipFill>
+          <a:blip r:embed="rId2"/>
+          <a:stretch>
+            <a:fillRect/>
+          </a:stretch>
+        </p:blipFill>
+        <p:spPr>
+          <a:xfrm>
+            <a:off x="0" y="0"/>
+            <a:ext cx="12188952" cy="6858000"/>
+          </a:xfrm>
+          <a:prstGeom prst="rect">
+            <a:avLst/>
+          </a:prstGeom>
+        </p:spPr>
+      </p:pic>
+    </p:spTree>
+  </p:cSld>
+  <p:clrMapOvr>
+    <a:masterClrMapping/>
+  </p:clrMapOvr>
+</p:sld>
+</file>
+
+<file path=ppt/slides/slide11.xml><?xml version="1.0" encoding="utf-8"?>
+<p:sld xmlns:a="http://schemas.openxmlformats.org/drawingml/2006/main" xmlns:p="http://schemas.openxmlformats.org/presentationml/2006/main" xmlns:r="http://schemas.openxmlformats.org/officeDocument/2006/relationships">
+  <p:cSld>
+    <p:spTree>
+      <p:nvGrpSpPr>
+        <p:cNvPr id="1" name=""/>
+        <p:cNvGrpSpPr/>
+        <p:nvPr/>
+      </p:nvGrpSpPr>
+      <p:grpSpPr/>
+      <p:pic>
+        <p:nvPicPr>
           <p:cNvPr id="2" name="Picture 1" descr="s7.png"/>
           <p:cNvPicPr>
             <a:picLocks noChangeAspect="1"/>
@@ -3172,7 +3215,7 @@
 </p:sld>
 </file>
 
-<file path=ppt/slides/slide11.xml><?xml version="1.0" encoding="utf-8"?>
+<file path=ppt/slides/slide12.xml><?xml version="1.0" encoding="utf-8"?>
 <p:sld xmlns:a="http://schemas.openxmlformats.org/drawingml/2006/main" xmlns:p="http://schemas.openxmlformats.org/presentationml/2006/main" xmlns:r="http://schemas.openxmlformats.org/officeDocument/2006/relationships">
   <p:cSld>
     <p:spTree>
@@ -3478,7 +3521,7 @@
       <p:grpSpPr/>
       <p:pic>
         <p:nvPicPr>
-          <p:cNvPr id="2" name="Picture 1" descr="s5.png"/>
+          <p:cNvPr id="2" name="Picture 1" descr="s4d.png"/>
           <p:cNvPicPr>
             <a:picLocks noChangeAspect="1"/>
           </p:cNvPicPr>
@@ -3520,7 +3563,7 @@
       <p:grpSpPr/>
       <p:pic>
         <p:nvPicPr>
-          <p:cNvPr id="2" name="Picture 1" descr="s6.png"/>
+          <p:cNvPr id="2" name="Picture 1" descr="s5.png"/>
           <p:cNvPicPr>
             <a:picLocks noChangeAspect="1"/>
           </p:cNvPicPr>

--- a/competition/haijuying-cretas-pitch.pptx
+++ b/competition/haijuying-cretas-pitch.pptx
@@ -17,6 +17,7 @@
     <p:sldId id="265" r:id="rId16"/>
     <p:sldId id="266" r:id="rId17"/>
     <p:sldId id="267" r:id="rId18"/>
+    <p:sldId id="268" r:id="rId19"/>
   </p:sldIdLst>
   <p:sldSz cx="12188952" cy="6858000" type="screen4x3"/>
   <p:notesSz cx="6858000" cy="9144000"/>
@@ -3143,7 +3144,7 @@
       <p:grpSpPr/>
       <p:pic>
         <p:nvPicPr>
-          <p:cNvPr id="2" name="Picture 1" descr="s6.png"/>
+          <p:cNvPr id="2" name="Picture 1" descr="s5.png"/>
           <p:cNvPicPr>
             <a:picLocks noChangeAspect="1"/>
           </p:cNvPicPr>
@@ -3185,6 +3186,48 @@
       <p:grpSpPr/>
       <p:pic>
         <p:nvPicPr>
+          <p:cNvPr id="2" name="Picture 1" descr="s6.png"/>
+          <p:cNvPicPr>
+            <a:picLocks noChangeAspect="1"/>
+          </p:cNvPicPr>
+          <p:nvPr/>
+        </p:nvPicPr>
+        <p:blipFill>
+          <a:blip r:embed="rId2"/>
+          <a:stretch>
+            <a:fillRect/>
+          </a:stretch>
+        </p:blipFill>
+        <p:spPr>
+          <a:xfrm>
+            <a:off x="0" y="0"/>
+            <a:ext cx="12188952" cy="6858000"/>
+          </a:xfrm>
+          <a:prstGeom prst="rect">
+            <a:avLst/>
+          </a:prstGeom>
+        </p:spPr>
+      </p:pic>
+    </p:spTree>
+  </p:cSld>
+  <p:clrMapOvr>
+    <a:masterClrMapping/>
+  </p:clrMapOvr>
+</p:sld>
+</file>
+
+<file path=ppt/slides/slide12.xml><?xml version="1.0" encoding="utf-8"?>
+<p:sld xmlns:a="http://schemas.openxmlformats.org/drawingml/2006/main" xmlns:p="http://schemas.openxmlformats.org/presentationml/2006/main" xmlns:r="http://schemas.openxmlformats.org/officeDocument/2006/relationships">
+  <p:cSld>
+    <p:spTree>
+      <p:nvGrpSpPr>
+        <p:cNvPr id="1" name=""/>
+        <p:cNvGrpSpPr/>
+        <p:nvPr/>
+      </p:nvGrpSpPr>
+      <p:grpSpPr/>
+      <p:pic>
+        <p:nvPicPr>
           <p:cNvPr id="2" name="Picture 1" descr="s7.png"/>
           <p:cNvPicPr>
             <a:picLocks noChangeAspect="1"/>
@@ -3215,7 +3258,7 @@
 </p:sld>
 </file>
 
-<file path=ppt/slides/slide12.xml><?xml version="1.0" encoding="utf-8"?>
+<file path=ppt/slides/slide13.xml><?xml version="1.0" encoding="utf-8"?>
 <p:sld xmlns:a="http://schemas.openxmlformats.org/drawingml/2006/main" xmlns:p="http://schemas.openxmlformats.org/presentationml/2006/main" xmlns:r="http://schemas.openxmlformats.org/officeDocument/2006/relationships">
   <p:cSld>
     <p:spTree>
@@ -3563,7 +3606,7 @@
       <p:grpSpPr/>
       <p:pic>
         <p:nvPicPr>
-          <p:cNvPr id="2" name="Picture 1" descr="s5.png"/>
+          <p:cNvPr id="2" name="Picture 1" descr="s4e.png"/>
           <p:cNvPicPr>
             <a:picLocks noChangeAspect="1"/>
           </p:cNvPicPr>
